--- a/dist/초2/진로·직업/일과협력/초2_진로·직업_일과협력_01_직업과협력_학생용.pptx
+++ b/dist/초2/진로·직업/일과협력/초2_진로·직업_일과협력_01_직업과협력_학생용.pptx
@@ -114,34 +114,34 @@
   <p:extLst>
     <p:ext uri="{521415D9-36F7-43E2-AB2F-B90AF26B5E84}">
       <p14:sectionLst xmlns:p14="http://schemas.microsoft.com/office/powerpoint/2010/main">
-        <p14:section name="도입" id="{7597a22e-fad7-93fe-ee98-8834c62425e8}">
+        <p14:section name="도입" id="{e4438790-e11a-55cb-0b50-7e4044d334e7}">
           <p14:sldIdLst>
             <p14:sldId id="256"/>
             <p14:sldId id="257"/>
           </p14:sldIdLst>
         </p14:section>
-        <p14:section name="개념" id="{51a0ce41-9e35-8811-c678-c30fed6aa3da}">
+        <p14:section name="개념" id="{8849f261-f5bd-33b8-d96d-2b177807552f}">
           <p14:sldIdLst>
             <p14:sldId id="258"/>
           </p14:sldIdLst>
         </p14:section>
-        <p14:section name="연습" id="{74446533-523f-ee3c-4e8c-152273ec4114}">
+        <p14:section name="연습" id="{1ff89247-cc0e-2022-9cff-4e767ff63eae}">
           <p14:sldIdLst>
             <p14:sldId id="259"/>
             <p14:sldId id="260"/>
           </p14:sldIdLst>
         </p14:section>
-        <p14:section name="확인" id="{c3789b49-decf-1b32-e509-1cdbed941e49}">
+        <p14:section name="확인" id="{20ea9d7d-35a5-4536-fbff-092d0485075d}">
           <p14:sldIdLst>
             <p14:sldId id="261"/>
           </p14:sldIdLst>
         </p14:section>
-        <p14:section name="정리" id="{2ef2090a-9ee7-2d1b-73dd-119ff57efbe1}">
+        <p14:section name="정리" id="{5a174f4e-7423-4540-ce42-0f939511594b}">
           <p14:sldIdLst>
             <p14:sldId id="262"/>
           </p14:sldIdLst>
         </p14:section>
-        <p14:section name="보충" id="{e92f086f-7609-3620-f762-0d5ea438a152}">
+        <p14:section name="보충" id="{96960aa8-3716-5e7e-902f-8528b8659da6}">
           <p14:sldIdLst>
             <p14:sldId id="263"/>
           </p14:sldIdLst>
